--- a/public/templates/buyer-meeting-prep-template.pptx
+++ b/public/templates/buyer-meeting-prep-template.pptx
@@ -4069,7 +4069,7 @@
                 <a:ea typeface="Aptos" pitchFamily="34" charset="-122"/>
                 <a:cs typeface="Aptos" pitchFamily="34" charset="-120"/>
               </a:rPr>
-              <a:t>Editable chart placeholder</a:t>
+              <a:t>Editable chart area</a:t>
             </a:r>
             <a:endParaRPr lang="en-US" sz="1000" dirty="0"/>
           </a:p>
@@ -6238,7 +6238,7 @@
                 <a:ea typeface="Aptos" pitchFamily="34" charset="-122"/>
                 <a:cs typeface="Aptos" pitchFamily="34" charset="-120"/>
               </a:rPr>
-              <a:t>Editable chart placeholder</a:t>
+              <a:t>Editable chart area</a:t>
             </a:r>
             <a:endParaRPr lang="en-US" sz="1000" dirty="0"/>
           </a:p>
@@ -8407,7 +8407,7 @@
                 <a:ea typeface="Aptos" pitchFamily="34" charset="-122"/>
                 <a:cs typeface="Aptos" pitchFamily="34" charset="-120"/>
               </a:rPr>
-              <a:t>Editable chart placeholder</a:t>
+              <a:t>Editable chart area</a:t>
             </a:r>
             <a:endParaRPr lang="en-US" sz="1000" dirty="0"/>
           </a:p>
@@ -10576,7 +10576,7 @@
                 <a:ea typeface="Aptos" pitchFamily="34" charset="-122"/>
                 <a:cs typeface="Aptos" pitchFamily="34" charset="-120"/>
               </a:rPr>
-              <a:t>Editable chart placeholder</a:t>
+              <a:t>Editable chart area</a:t>
             </a:r>
             <a:endParaRPr lang="en-US" sz="1000" dirty="0"/>
           </a:p>
@@ -12745,7 +12745,7 @@
                 <a:ea typeface="Aptos" pitchFamily="34" charset="-122"/>
                 <a:cs typeface="Aptos" pitchFamily="34" charset="-120"/>
               </a:rPr>
-              <a:t>Editable chart placeholder</a:t>
+              <a:t>Editable chart area</a:t>
             </a:r>
             <a:endParaRPr lang="en-US" sz="1000" dirty="0"/>
           </a:p>
@@ -14914,7 +14914,7 @@
                 <a:ea typeface="Aptos" pitchFamily="34" charset="-122"/>
                 <a:cs typeface="Aptos" pitchFamily="34" charset="-120"/>
               </a:rPr>
-              <a:t>Editable chart placeholder</a:t>
+              <a:t>Editable chart area</a:t>
             </a:r>
             <a:endParaRPr lang="en-US" sz="1000" dirty="0"/>
           </a:p>
@@ -17083,7 +17083,7 @@
                 <a:ea typeface="Aptos" pitchFamily="34" charset="-122"/>
                 <a:cs typeface="Aptos" pitchFamily="34" charset="-120"/>
               </a:rPr>
-              <a:t>Editable chart placeholder</a:t>
+              <a:t>Editable chart area</a:t>
             </a:r>
             <a:endParaRPr lang="en-US" sz="1000" dirty="0"/>
           </a:p>

--- a/public/templates/buyer-meeting-prep-template.pptx
+++ b/public/templates/buyer-meeting-prep-template.pptx
@@ -1525,7 +1525,7 @@
       </p:sp>
       <p:pic>
         <p:nvPicPr>
-          <p:cNvPr id="3" name="Image 0" descr="/Users/phylsion/Desktop/nam-tools/public/images/branding/logo-full.png">    </p:cNvPr>
+          <p:cNvPr id="3" name="Image 0" descr="APT logo">    </p:cNvPr>
           <p:cNvPicPr>
             <a:picLocks noChangeAspect="1"/>
           </p:cNvPicPr>
@@ -1691,7 +1691,7 @@
       </p:sp>
       <p:pic>
         <p:nvPicPr>
-          <p:cNvPr id="8" name="Image 1" descr="/Users/phylsion/Desktop/nam-tools/public/images/branding/logo-full.png">    </p:cNvPr>
+          <p:cNvPr id="8" name="Image 1" descr="APT logo">    </p:cNvPr>
           <p:cNvPicPr>
             <a:picLocks noChangeAspect="1"/>
           </p:cNvPicPr>
@@ -1843,7 +1843,7 @@
                 <a:ea typeface="Aptos" pitchFamily="34" charset="-122"/>
                 <a:cs typeface="Aptos" pitchFamily="34" charset="-120"/>
               </a:rPr>
-              <a:t>Prepared with editable fictional data for NAM and commercial planning.</a:t>
+              <a:t>Prepared with editable fictional data for account and commercial planning.</a:t>
             </a:r>
             <a:endParaRPr lang="en-US" sz="1300" dirty="0"/>
           </a:p>
@@ -2326,7 +2326,7 @@
       </p:sp>
       <p:pic>
         <p:nvPicPr>
-          <p:cNvPr id="3" name="Image 0" descr="/Users/phylsion/Desktop/nam-tools/public/images/branding/logo-full.png">    </p:cNvPr>
+          <p:cNvPr id="3" name="Image 0" descr="APT logo">    </p:cNvPr>
           <p:cNvPicPr>
             <a:picLocks noChangeAspect="1"/>
           </p:cNvPicPr>
@@ -4495,7 +4495,7 @@
       </p:sp>
       <p:pic>
         <p:nvPicPr>
-          <p:cNvPr id="3" name="Image 0" descr="/Users/phylsion/Desktop/nam-tools/public/images/branding/logo-full.png">    </p:cNvPr>
+          <p:cNvPr id="3" name="Image 0" descr="APT logo">    </p:cNvPr>
           <p:cNvPicPr>
             <a:picLocks noChangeAspect="1"/>
           </p:cNvPicPr>
@@ -6664,7 +6664,7 @@
       </p:sp>
       <p:pic>
         <p:nvPicPr>
-          <p:cNvPr id="3" name="Image 0" descr="/Users/phylsion/Desktop/nam-tools/public/images/branding/logo-full.png">    </p:cNvPr>
+          <p:cNvPr id="3" name="Image 0" descr="APT logo">    </p:cNvPr>
           <p:cNvPicPr>
             <a:picLocks noChangeAspect="1"/>
           </p:cNvPicPr>
@@ -8833,7 +8833,7 @@
       </p:sp>
       <p:pic>
         <p:nvPicPr>
-          <p:cNvPr id="3" name="Image 0" descr="/Users/phylsion/Desktop/nam-tools/public/images/branding/logo-full.png">    </p:cNvPr>
+          <p:cNvPr id="3" name="Image 0" descr="APT logo">    </p:cNvPr>
           <p:cNvPicPr>
             <a:picLocks noChangeAspect="1"/>
           </p:cNvPicPr>
@@ -11002,7 +11002,7 @@
       </p:sp>
       <p:pic>
         <p:nvPicPr>
-          <p:cNvPr id="3" name="Image 0" descr="/Users/phylsion/Desktop/nam-tools/public/images/branding/logo-full.png">    </p:cNvPr>
+          <p:cNvPr id="3" name="Image 0" descr="APT logo">    </p:cNvPr>
           <p:cNvPicPr>
             <a:picLocks noChangeAspect="1"/>
           </p:cNvPicPr>
@@ -13171,7 +13171,7 @@
       </p:sp>
       <p:pic>
         <p:nvPicPr>
-          <p:cNvPr id="3" name="Image 0" descr="/Users/phylsion/Desktop/nam-tools/public/images/branding/logo-full.png">    </p:cNvPr>
+          <p:cNvPr id="3" name="Image 0" descr="APT logo">    </p:cNvPr>
           <p:cNvPicPr>
             <a:picLocks noChangeAspect="1"/>
           </p:cNvPicPr>
@@ -15340,7 +15340,7 @@
       </p:sp>
       <p:pic>
         <p:nvPicPr>
-          <p:cNvPr id="3" name="Image 0" descr="/Users/phylsion/Desktop/nam-tools/public/images/branding/logo-full.png">    </p:cNvPr>
+          <p:cNvPr id="3" name="Image 0" descr="APT logo">    </p:cNvPr>
           <p:cNvPicPr>
             <a:picLocks noChangeAspect="1"/>
           </p:cNvPicPr>
